--- a/assets/pptx/catalog-555.pptx
+++ b/assets/pptx/catalog-555.pptx
@@ -3613,7 +3613,7 @@
                 <a:ea typeface="Ebrima"/>
                 <a:cs typeface="Ebrima"/>
               </a:rPr>
-              <a:t>ምስጋና ትወዳለህና (አምላኬ አመሰግናለሁ)2X</a:t>
+              <a:t>ምስጋና ትወዳለህና አምላኬ አመሰግናለሁ2X</a:t>
             </a:r>
           </a:p>
           <a:p>
@@ -3631,7 +3631,7 @@
                 <a:ea typeface="Ebrima"/>
                 <a:cs typeface="Ebrima"/>
               </a:rPr>
-              <a:t>አምልኮ ትወዳለህና (አምላኬ እኔ አመልክሀለው)2X</a:t>
+              <a:t>አምልኮ ትወዳለህና አምላኬ እኔ አመልክሀለው2X</a:t>
             </a:r>
           </a:p>
           <a:p>
@@ -3649,7 +3649,7 @@
                 <a:ea typeface="Ebrima"/>
                 <a:cs typeface="Ebrima"/>
               </a:rPr>
-              <a:t>ሞገስን ትወዳለህና (ጌታዬ አሞግስሀለው)2X</a:t>
+              <a:t>ሞገስን ትወዳለህና ጌታዬ አሞግስሀለው2X</a:t>
             </a:r>
           </a:p>
           <a:p>
@@ -3667,7 +3667,7 @@
                 <a:ea typeface="Ebrima"/>
                 <a:cs typeface="Ebrima"/>
               </a:rPr>
-              <a:t>መከበር ትወዳለህና (አምላኬ እኔ አከብርሀለው)2X</a:t>
+              <a:t>መከበር ትወዳለህና አምላኬ እኔ አከብርሀለው2X</a:t>
             </a:r>
           </a:p>
           <a:p>
@@ -3891,7 +3891,7 @@
                 <a:ea typeface="Ebrima"/>
                 <a:cs typeface="Ebrima"/>
               </a:rPr>
-              <a:t>ምስጋና ትወዳለህና (አምላኬ አመሰግናለሁ)2X</a:t>
+              <a:t>ምስጋና ትወዳለህና አምላኬ አመሰግናለሁ2X</a:t>
             </a:r>
           </a:p>
           <a:p>
@@ -3909,7 +3909,7 @@
                 <a:ea typeface="Ebrima"/>
                 <a:cs typeface="Ebrima"/>
               </a:rPr>
-              <a:t>ሙገሳን ትወዳለህና (ጌታዬ አሞግስሀለው) 2X</a:t>
+              <a:t>ሙገሳን ትወዳለህና ጌታዬ አሞግስሀለው 2X</a:t>
             </a:r>
           </a:p>
           <a:p>
@@ -3927,7 +3927,7 @@
                 <a:ea typeface="Ebrima"/>
                 <a:cs typeface="Ebrima"/>
               </a:rPr>
-              <a:t>መወደድ ትወዳለህና (ጌታዬ እኔ እወድሃለሁ)2X</a:t>
+              <a:t>መወደድ ትወዳለህና ጌታዬ እኔ እወድሃለሁ2X</a:t>
             </a:r>
           </a:p>
           <a:p>
@@ -3945,7 +3945,7 @@
                 <a:ea typeface="Ebrima"/>
                 <a:cs typeface="Ebrima"/>
               </a:rPr>
-              <a:t>መወደስ ትወዳለህና (ጌታዬ እወድስሀለው)2X</a:t>
+              <a:t>መወደስ ትወዳለህና ጌታዬ እወድስሀለው2X</a:t>
             </a:r>
           </a:p>
           <a:p>
@@ -4272,7 +4272,7 @@
                 <a:ea typeface="Ebrima"/>
                 <a:cs typeface="Ebrima"/>
               </a:rPr>
-              <a:t>ምስጋና ትወዳለህና (አምላኬ አመሰግናለሁ)2X</a:t>
+              <a:t>ምስጋና ትወዳለህና አምላኬ አመሰግናለሁ2X</a:t>
             </a:r>
           </a:p>
           <a:p>
@@ -4290,7 +4290,7 @@
                 <a:ea typeface="Ebrima"/>
                 <a:cs typeface="Ebrima"/>
               </a:rPr>
-              <a:t>አምልኮ ትወዳለህና (አምላኬ እኔ አመልክሀለው)2X</a:t>
+              <a:t>አምልኮ ትወዳለህና አምላኬ እኔ አመልክሀለው2X</a:t>
             </a:r>
           </a:p>
           <a:p>
@@ -4308,7 +4308,7 @@
                 <a:ea typeface="Ebrima"/>
                 <a:cs typeface="Ebrima"/>
               </a:rPr>
-              <a:t>መከበር ትወዳለህና አምላኬ (እኔ አከብርሀለው)2X</a:t>
+              <a:t>መከበር ትወዳለህና አምላኬ እኔ አከብርሀለው2X</a:t>
             </a:r>
           </a:p>
           <a:p>
@@ -4326,7 +4326,7 @@
                 <a:ea typeface="Ebrima"/>
                 <a:cs typeface="Ebrima"/>
               </a:rPr>
-              <a:t>መሞገስ ትወዳለህና (ጌታዬ አሞግስሀለው)2X</a:t>
+              <a:t>መሞገስ ትወዳለህና ጌታዬ አሞግስሀለው2X</a:t>
             </a:r>
           </a:p>
           <a:p>
